--- a/crates/pptx-edit/tests/fixtures/run-kern.pptx
+++ b/crates/pptx-edit/tests/fixtures/run-kern.pptx
@@ -248,7 +248,11 @@
           <a:bodyPr lIns="0" rIns="0" tIns="0" bIns="0">
             <a:noAutofit/>
           </a:bodyPr>
-          <a:lstStyle/>
+          <a:lstStyle>
+            <a:lvl1pPr>
+              <a:defRPr kern="0"/>
+            </a:lvl1pPr>
+          </a:lstStyle>
           <a:p>
             <a:pPr/>
             <a:r>
